--- a/public/fun/pack/pptx/weddingpro/결혼식프리미엄_19_오시는길중심_레몬크림.pptx
+++ b/public/fun/pack/pptx/weddingpro/결혼식프리미엄_19_오시는길중심_레몬크림.pptx
@@ -113,12 +113,12 @@
   <p:extLst>
     <p:ext uri="{521415D9-36F7-43E2-AB2F-B90AF26B5E84}">
       <p14:sectionLst xmlns:p14="http://schemas.microsoft.com/office/powerpoint/2010/main">
-        <p14:section name="시작" id="{2BA56424-3323-4420-B82D-C31D1CCED11E}">
+        <p14:section name="시작" id="{B947E333-375B-4895-8808-14E51F83D7B8}">
           <p14:sldIdLst>
             <p14:sldId id="256"/>
           </p14:sldIdLst>
         </p14:section>
-        <p14:section name="본문" id="{BA1DDF7D-70DA-40EA-98E9-BC2E73B7DB6B}">
+        <p14:section name="본문" id="{3A14AD66-329F-48D0-BAE9-6F7ABD9DC63D}">
           <p14:sldIdLst>
             <p14:sldId id="257"/>
             <p14:sldId id="258"/>
@@ -127,7 +127,7 @@
             <p14:sldId id="261"/>
           </p14:sldIdLst>
         </p14:section>
-        <p14:section name="마무리" id="{9F55548E-28F3-46F2-B2AA-97FAD2FDF315}">
+        <p14:section name="마무리" id="{C7222AB0-E799-4830-B0DD-70ED99003051}">
           <p14:sldIdLst>
             <p14:sldId id="262"/>
           </p14:sldIdLst>
@@ -1539,7 +1539,7 @@
             </a:lvl1pPr>
           </a:lstStyle>
           <a:p>
-            <a:fld id="{DD5861C4-363E-483D-9FBC-CDAEC80C46BC}" type="slidenum">
+            <a:fld id="{7AC74EB9-38BE-44D5-A1EE-15F6F8EA9474}" type="slidenum">
               <a:rPr lang="en-US"/>
               <a:t>‹#›</a:t>
             </a:fld>
@@ -2280,7 +2280,7 @@
             </a:lvl1pPr>
           </a:lstStyle>
           <a:p>
-            <a:fld id="{51788324-2746-4CDF-853E-5B711A8C6DDC}" type="slidenum">
+            <a:fld id="{A1C00EBD-1494-45F8-AC79-DFF5D47EA382}" type="slidenum">
               <a:rPr lang="en-US"/>
               <a:t>‹#›</a:t>
             </a:fld>
@@ -3029,7 +3029,7 @@
             </a:lvl1pPr>
           </a:lstStyle>
           <a:p>
-            <a:fld id="{F17E1443-1AF8-4B01-9508-719E0D610662}" type="slidenum">
+            <a:fld id="{2F547342-691D-46BE-8B7C-E79B011F76E6}" type="slidenum">
               <a:rPr lang="en-US"/>
               <a:t>‹#›</a:t>
             </a:fld>
@@ -3920,7 +3920,7 @@
           <a:p>
             <a:r>
               <a:rPr lang="ko-KR"/>
-              <a:t>0000. 00. 00 · 예식장 이름</a:t>
+              <a:t>날짜 입력 · 예식장 이름</a:t>
             </a:r>
           </a:p>
         </p:txBody>
@@ -4165,7 +4165,7 @@
           <a:bodyPr/>
           <a:lstStyle/>
           <a:p>
-            <a:fld id="{75B509C7-FE32-4B88-8CE0-CF1C690B7CAA}" type="slidenum">
+            <a:fld id="{8956BE52-8992-4B5B-852A-39F84AFD123A}" type="slidenum">
               <a:rPr lang="en-US"/>
               <a:t>‹#›</a:t>
             </a:fld>
@@ -4709,7 +4709,7 @@
           <a:bodyPr/>
           <a:lstStyle/>
           <a:p>
-            <a:fld id="{9F81B24B-36C2-447C-97F6-1E0180F48EF6}" type="slidenum">
+            <a:fld id="{14955465-6AD7-460E-AB8E-564312B47C68}" type="slidenum">
               <a:rPr lang="en-US"/>
               <a:t>‹#›</a:t>
             </a:fld>
@@ -5169,7 +5169,7 @@
           <a:bodyPr/>
           <a:lstStyle/>
           <a:p>
-            <a:fld id="{9B6D328E-83FB-49B8-9980-C02CAD3B1CFC}" type="slidenum">
+            <a:fld id="{0DB66B85-83B6-47EB-B3CC-0E3A51EC48B1}" type="slidenum">
               <a:rPr lang="en-US"/>
               <a:t>‹#›</a:t>
             </a:fld>
@@ -6599,7 +6599,7 @@
           <a:bodyPr/>
           <a:lstStyle/>
           <a:p>
-            <a:fld id="{82868D9A-81FF-4CBC-B259-96D5ED3DC145}" type="slidenum">
+            <a:fld id="{CFB8AAF2-D6E7-4054-81CD-0E2D2599B756}" type="slidenum">
               <a:rPr lang="en-US"/>
               <a:t>‹#›</a:t>
             </a:fld>
@@ -6709,7 +6709,7 @@
           <a:bodyPr/>
           <a:lstStyle/>
           <a:p>
-            <a:fld id="{8D56F85B-A3E8-4ED6-8A82-BBE290F5E4C9}" type="slidenum">
+            <a:fld id="{C715B0BA-0990-41DC-A482-B531FD6D7DD6}" type="slidenum">
               <a:rPr lang="en-US"/>
               <a:t>‹#›</a:t>
             </a:fld>
